--- a/SST_Complete_Course_SagarSir/03_Geography_भूगोल/Class_17_Geography_Grand_Marathon.pptx
+++ b/SST_Complete_Course_SagarSir/03_Geography_भूगोल/Class_17_Geography_Grand_Marathon.pptx
@@ -3394,7 +3394,7 @@
               </a:defRPr>
             </a:pPr>
             <a:r>
-              <a:t>मार्गदर्शक: श्रवण कुमार 'सागर' (Sagar Sir)  |  Helpline: +91 91101 13671  |  sagarcoaching.tech</a:t>
+              <a:t>मार्गदर्शक: श्रवण कुमार 'सागर' (Sagar Sir)  |  sagarcoaching.tech</a:t>
             </a:r>
           </a:p>
         </p:txBody>
@@ -3585,7 +3585,7 @@
               </a:defRPr>
             </a:pPr>
             <a:r>
-              <a:t>WhatsApp / Helpline: +91 91101 13671  |  Official Website: sagarcoaching.tech  |  Slide 10 of 64</a:t>
+              <a:t>Official Website: sagarcoaching.tech  |  Slide 10 of 64</a:t>
             </a:r>
           </a:p>
         </p:txBody>
@@ -4119,7 +4119,7 @@
               </a:defRPr>
             </a:pPr>
             <a:r>
-              <a:t>WhatsApp / Helpline: +91 91101 13671  |  Official Website: sagarcoaching.tech  |  Slide 11 of 64</a:t>
+              <a:t>Official Website: sagarcoaching.tech  |  Slide 11 of 64</a:t>
             </a:r>
           </a:p>
         </p:txBody>
@@ -4585,7 +4585,7 @@
               </a:defRPr>
             </a:pPr>
             <a:r>
-              <a:t>WhatsApp / Helpline: +91 91101 13671  |  Official Website: sagarcoaching.tech  |  Slide 12 of 64</a:t>
+              <a:t>Official Website: sagarcoaching.tech  |  Slide 12 of 64</a:t>
             </a:r>
           </a:p>
         </p:txBody>
@@ -5119,7 +5119,7 @@
               </a:defRPr>
             </a:pPr>
             <a:r>
-              <a:t>WhatsApp / Helpline: +91 91101 13671  |  Official Website: sagarcoaching.tech  |  Slide 13 of 64</a:t>
+              <a:t>Official Website: sagarcoaching.tech  |  Slide 13 of 64</a:t>
             </a:r>
           </a:p>
         </p:txBody>
@@ -5585,7 +5585,7 @@
               </a:defRPr>
             </a:pPr>
             <a:r>
-              <a:t>WhatsApp / Helpline: +91 91101 13671  |  Official Website: sagarcoaching.tech  |  Slide 14 of 64</a:t>
+              <a:t>Official Website: sagarcoaching.tech  |  Slide 14 of 64</a:t>
             </a:r>
           </a:p>
         </p:txBody>
@@ -6119,7 +6119,7 @@
               </a:defRPr>
             </a:pPr>
             <a:r>
-              <a:t>WhatsApp / Helpline: +91 91101 13671  |  Official Website: sagarcoaching.tech  |  Slide 15 of 64</a:t>
+              <a:t>Official Website: sagarcoaching.tech  |  Slide 15 of 64</a:t>
             </a:r>
           </a:p>
         </p:txBody>
@@ -6585,7 +6585,7 @@
               </a:defRPr>
             </a:pPr>
             <a:r>
-              <a:t>WhatsApp / Helpline: +91 91101 13671  |  Official Website: sagarcoaching.tech  |  Slide 16 of 64</a:t>
+              <a:t>Official Website: sagarcoaching.tech  |  Slide 16 of 64</a:t>
             </a:r>
           </a:p>
         </p:txBody>
@@ -7119,7 +7119,7 @@
               </a:defRPr>
             </a:pPr>
             <a:r>
-              <a:t>WhatsApp / Helpline: +91 91101 13671  |  Official Website: sagarcoaching.tech  |  Slide 17 of 64</a:t>
+              <a:t>Official Website: sagarcoaching.tech  |  Slide 17 of 64</a:t>
             </a:r>
           </a:p>
         </p:txBody>
@@ -7585,7 +7585,7 @@
               </a:defRPr>
             </a:pPr>
             <a:r>
-              <a:t>WhatsApp / Helpline: +91 91101 13671  |  Official Website: sagarcoaching.tech  |  Slide 18 of 64</a:t>
+              <a:t>Official Website: sagarcoaching.tech  |  Slide 18 of 64</a:t>
             </a:r>
           </a:p>
         </p:txBody>
@@ -8119,7 +8119,7 @@
               </a:defRPr>
             </a:pPr>
             <a:r>
-              <a:t>WhatsApp / Helpline: +91 91101 13671  |  Official Website: sagarcoaching.tech  |  Slide 19 of 64</a:t>
+              <a:t>Official Website: sagarcoaching.tech  |  Slide 19 of 64</a:t>
             </a:r>
           </a:p>
         </p:txBody>
@@ -8585,7 +8585,7 @@
               </a:defRPr>
             </a:pPr>
             <a:r>
-              <a:t>WhatsApp / Helpline: +91 91101 13671  |  Official Website: sagarcoaching.tech  |  Slide 2 of 64</a:t>
+              <a:t>Official Website: sagarcoaching.tech  |  Slide 2 of 64</a:t>
             </a:r>
           </a:p>
         </p:txBody>
@@ -8983,7 +8983,7 @@
               </a:defRPr>
             </a:pPr>
             <a:r>
-              <a:t>WhatsApp / Helpline: +91 91101 13671  |  Official Website: sagarcoaching.tech  |  Slide 20 of 64</a:t>
+              <a:t>Official Website: sagarcoaching.tech  |  Slide 20 of 64</a:t>
             </a:r>
           </a:p>
         </p:txBody>
@@ -9517,7 +9517,7 @@
               </a:defRPr>
             </a:pPr>
             <a:r>
-              <a:t>WhatsApp / Helpline: +91 91101 13671  |  Official Website: sagarcoaching.tech  |  Slide 21 of 64</a:t>
+              <a:t>Official Website: sagarcoaching.tech  |  Slide 21 of 64</a:t>
             </a:r>
           </a:p>
         </p:txBody>
@@ -9983,7 +9983,7 @@
               </a:defRPr>
             </a:pPr>
             <a:r>
-              <a:t>WhatsApp / Helpline: +91 91101 13671  |  Official Website: sagarcoaching.tech  |  Slide 22 of 64</a:t>
+              <a:t>Official Website: sagarcoaching.tech  |  Slide 22 of 64</a:t>
             </a:r>
           </a:p>
         </p:txBody>
@@ -10517,7 +10517,7 @@
               </a:defRPr>
             </a:pPr>
             <a:r>
-              <a:t>WhatsApp / Helpline: +91 91101 13671  |  Official Website: sagarcoaching.tech  |  Slide 23 of 64</a:t>
+              <a:t>Official Website: sagarcoaching.tech  |  Slide 23 of 64</a:t>
             </a:r>
           </a:p>
         </p:txBody>
@@ -10983,7 +10983,7 @@
               </a:defRPr>
             </a:pPr>
             <a:r>
-              <a:t>WhatsApp / Helpline: +91 91101 13671  |  Official Website: sagarcoaching.tech  |  Slide 24 of 64</a:t>
+              <a:t>Official Website: sagarcoaching.tech  |  Slide 24 of 64</a:t>
             </a:r>
           </a:p>
         </p:txBody>
@@ -11517,7 +11517,7 @@
               </a:defRPr>
             </a:pPr>
             <a:r>
-              <a:t>WhatsApp / Helpline: +91 91101 13671  |  Official Website: sagarcoaching.tech  |  Slide 25 of 64</a:t>
+              <a:t>Official Website: sagarcoaching.tech  |  Slide 25 of 64</a:t>
             </a:r>
           </a:p>
         </p:txBody>
@@ -11983,7 +11983,7 @@
               </a:defRPr>
             </a:pPr>
             <a:r>
-              <a:t>WhatsApp / Helpline: +91 91101 13671  |  Official Website: sagarcoaching.tech  |  Slide 26 of 64</a:t>
+              <a:t>Official Website: sagarcoaching.tech  |  Slide 26 of 64</a:t>
             </a:r>
           </a:p>
         </p:txBody>
@@ -12517,7 +12517,7 @@
               </a:defRPr>
             </a:pPr>
             <a:r>
-              <a:t>WhatsApp / Helpline: +91 91101 13671  |  Official Website: sagarcoaching.tech  |  Slide 27 of 64</a:t>
+              <a:t>Official Website: sagarcoaching.tech  |  Slide 27 of 64</a:t>
             </a:r>
           </a:p>
         </p:txBody>
@@ -12983,7 +12983,7 @@
               </a:defRPr>
             </a:pPr>
             <a:r>
-              <a:t>WhatsApp / Helpline: +91 91101 13671  |  Official Website: sagarcoaching.tech  |  Slide 28 of 64</a:t>
+              <a:t>Official Website: sagarcoaching.tech  |  Slide 28 of 64</a:t>
             </a:r>
           </a:p>
         </p:txBody>
@@ -13517,7 +13517,7 @@
               </a:defRPr>
             </a:pPr>
             <a:r>
-              <a:t>WhatsApp / Helpline: +91 91101 13671  |  Official Website: sagarcoaching.tech  |  Slide 29 of 64</a:t>
+              <a:t>Official Website: sagarcoaching.tech  |  Slide 29 of 64</a:t>
             </a:r>
           </a:p>
         </p:txBody>
@@ -13983,7 +13983,7 @@
               </a:defRPr>
             </a:pPr>
             <a:r>
-              <a:t>WhatsApp / Helpline: +91 91101 13671  |  Official Website: sagarcoaching.tech  |  Slide 3 of 64</a:t>
+              <a:t>Official Website: sagarcoaching.tech  |  Slide 3 of 64</a:t>
             </a:r>
           </a:p>
         </p:txBody>
@@ -14449,7 +14449,7 @@
               </a:defRPr>
             </a:pPr>
             <a:r>
-              <a:t>WhatsApp / Helpline: +91 91101 13671  |  Official Website: sagarcoaching.tech  |  Slide 30 of 64</a:t>
+              <a:t>Official Website: sagarcoaching.tech  |  Slide 30 of 64</a:t>
             </a:r>
           </a:p>
         </p:txBody>
@@ -14983,7 +14983,7 @@
               </a:defRPr>
             </a:pPr>
             <a:r>
-              <a:t>WhatsApp / Helpline: +91 91101 13671  |  Official Website: sagarcoaching.tech  |  Slide 31 of 64</a:t>
+              <a:t>Official Website: sagarcoaching.tech  |  Slide 31 of 64</a:t>
             </a:r>
           </a:p>
         </p:txBody>
@@ -15449,7 +15449,7 @@
               </a:defRPr>
             </a:pPr>
             <a:r>
-              <a:t>WhatsApp / Helpline: +91 91101 13671  |  Official Website: sagarcoaching.tech  |  Slide 32 of 64</a:t>
+              <a:t>Official Website: sagarcoaching.tech  |  Slide 32 of 64</a:t>
             </a:r>
           </a:p>
         </p:txBody>
@@ -15983,7 +15983,7 @@
               </a:defRPr>
             </a:pPr>
             <a:r>
-              <a:t>WhatsApp / Helpline: +91 91101 13671  |  Official Website: sagarcoaching.tech  |  Slide 33 of 64</a:t>
+              <a:t>Official Website: sagarcoaching.tech  |  Slide 33 of 64</a:t>
             </a:r>
           </a:p>
         </p:txBody>
@@ -16449,7 +16449,7 @@
               </a:defRPr>
             </a:pPr>
             <a:r>
-              <a:t>WhatsApp / Helpline: +91 91101 13671  |  Official Website: sagarcoaching.tech  |  Slide 34 of 64</a:t>
+              <a:t>Official Website: sagarcoaching.tech  |  Slide 34 of 64</a:t>
             </a:r>
           </a:p>
         </p:txBody>
@@ -16983,7 +16983,7 @@
               </a:defRPr>
             </a:pPr>
             <a:r>
-              <a:t>WhatsApp / Helpline: +91 91101 13671  |  Official Website: sagarcoaching.tech  |  Slide 35 of 64</a:t>
+              <a:t>Official Website: sagarcoaching.tech  |  Slide 35 of 64</a:t>
             </a:r>
           </a:p>
         </p:txBody>
@@ -17449,7 +17449,7 @@
               </a:defRPr>
             </a:pPr>
             <a:r>
-              <a:t>WhatsApp / Helpline: +91 91101 13671  |  Official Website: sagarcoaching.tech  |  Slide 36 of 64</a:t>
+              <a:t>Official Website: sagarcoaching.tech  |  Slide 36 of 64</a:t>
             </a:r>
           </a:p>
         </p:txBody>
@@ -17983,7 +17983,7 @@
               </a:defRPr>
             </a:pPr>
             <a:r>
-              <a:t>WhatsApp / Helpline: +91 91101 13671  |  Official Website: sagarcoaching.tech  |  Slide 37 of 64</a:t>
+              <a:t>Official Website: sagarcoaching.tech  |  Slide 37 of 64</a:t>
             </a:r>
           </a:p>
         </p:txBody>
@@ -18449,7 +18449,7 @@
               </a:defRPr>
             </a:pPr>
             <a:r>
-              <a:t>WhatsApp / Helpline: +91 91101 13671  |  Official Website: sagarcoaching.tech  |  Slide 38 of 64</a:t>
+              <a:t>Official Website: sagarcoaching.tech  |  Slide 38 of 64</a:t>
             </a:r>
           </a:p>
         </p:txBody>
@@ -18983,7 +18983,7 @@
               </a:defRPr>
             </a:pPr>
             <a:r>
-              <a:t>WhatsApp / Helpline: +91 91101 13671  |  Official Website: sagarcoaching.tech  |  Slide 39 of 64</a:t>
+              <a:t>Official Website: sagarcoaching.tech  |  Slide 39 of 64</a:t>
             </a:r>
           </a:p>
         </p:txBody>
@@ -19449,7 +19449,7 @@
               </a:defRPr>
             </a:pPr>
             <a:r>
-              <a:t>WhatsApp / Helpline: +91 91101 13671  |  Official Website: sagarcoaching.tech  |  Slide 4 of 64</a:t>
+              <a:t>Official Website: sagarcoaching.tech  |  Slide 4 of 64</a:t>
             </a:r>
           </a:p>
         </p:txBody>
@@ -19983,7 +19983,7 @@
               </a:defRPr>
             </a:pPr>
             <a:r>
-              <a:t>WhatsApp / Helpline: +91 91101 13671  |  Official Website: sagarcoaching.tech  |  Slide 40 of 64</a:t>
+              <a:t>Official Website: sagarcoaching.tech  |  Slide 40 of 64</a:t>
             </a:r>
           </a:p>
         </p:txBody>
@@ -20517,7 +20517,7 @@
               </a:defRPr>
             </a:pPr>
             <a:r>
-              <a:t>WhatsApp / Helpline: +91 91101 13671  |  Official Website: sagarcoaching.tech  |  Slide 41 of 64</a:t>
+              <a:t>Official Website: sagarcoaching.tech  |  Slide 41 of 64</a:t>
             </a:r>
           </a:p>
         </p:txBody>
@@ -20983,7 +20983,7 @@
               </a:defRPr>
             </a:pPr>
             <a:r>
-              <a:t>WhatsApp / Helpline: +91 91101 13671  |  Official Website: sagarcoaching.tech  |  Slide 42 of 64</a:t>
+              <a:t>Official Website: sagarcoaching.tech  |  Slide 42 of 64</a:t>
             </a:r>
           </a:p>
         </p:txBody>
@@ -21517,7 +21517,7 @@
               </a:defRPr>
             </a:pPr>
             <a:r>
-              <a:t>WhatsApp / Helpline: +91 91101 13671  |  Official Website: sagarcoaching.tech  |  Slide 43 of 64</a:t>
+              <a:t>Official Website: sagarcoaching.tech  |  Slide 43 of 64</a:t>
             </a:r>
           </a:p>
         </p:txBody>
@@ -21983,7 +21983,7 @@
               </a:defRPr>
             </a:pPr>
             <a:r>
-              <a:t>WhatsApp / Helpline: +91 91101 13671  |  Official Website: sagarcoaching.tech  |  Slide 44 of 64</a:t>
+              <a:t>Official Website: sagarcoaching.tech  |  Slide 44 of 64</a:t>
             </a:r>
           </a:p>
         </p:txBody>
@@ -22517,7 +22517,7 @@
               </a:defRPr>
             </a:pPr>
             <a:r>
-              <a:t>WhatsApp / Helpline: +91 91101 13671  |  Official Website: sagarcoaching.tech  |  Slide 45 of 64</a:t>
+              <a:t>Official Website: sagarcoaching.tech  |  Slide 45 of 64</a:t>
             </a:r>
           </a:p>
         </p:txBody>
@@ -22983,7 +22983,7 @@
               </a:defRPr>
             </a:pPr>
             <a:r>
-              <a:t>WhatsApp / Helpline: +91 91101 13671  |  Official Website: sagarcoaching.tech  |  Slide 46 of 64</a:t>
+              <a:t>Official Website: sagarcoaching.tech  |  Slide 46 of 64</a:t>
             </a:r>
           </a:p>
         </p:txBody>
@@ -23517,7 +23517,7 @@
               </a:defRPr>
             </a:pPr>
             <a:r>
-              <a:t>WhatsApp / Helpline: +91 91101 13671  |  Official Website: sagarcoaching.tech  |  Slide 47 of 64</a:t>
+              <a:t>Official Website: sagarcoaching.tech  |  Slide 47 of 64</a:t>
             </a:r>
           </a:p>
         </p:txBody>
@@ -23983,7 +23983,7 @@
               </a:defRPr>
             </a:pPr>
             <a:r>
-              <a:t>WhatsApp / Helpline: +91 91101 13671  |  Official Website: sagarcoaching.tech  |  Slide 48 of 64</a:t>
+              <a:t>Official Website: sagarcoaching.tech  |  Slide 48 of 64</a:t>
             </a:r>
           </a:p>
         </p:txBody>
@@ -24517,7 +24517,7 @@
               </a:defRPr>
             </a:pPr>
             <a:r>
-              <a:t>WhatsApp / Helpline: +91 91101 13671  |  Official Website: sagarcoaching.tech  |  Slide 49 of 64</a:t>
+              <a:t>Official Website: sagarcoaching.tech  |  Slide 49 of 64</a:t>
             </a:r>
           </a:p>
         </p:txBody>
@@ -24983,7 +24983,7 @@
               </a:defRPr>
             </a:pPr>
             <a:r>
-              <a:t>WhatsApp / Helpline: +91 91101 13671  |  Official Website: sagarcoaching.tech  |  Slide 5 of 64</a:t>
+              <a:t>Official Website: sagarcoaching.tech  |  Slide 5 of 64</a:t>
             </a:r>
           </a:p>
         </p:txBody>
@@ -25449,7 +25449,7 @@
               </a:defRPr>
             </a:pPr>
             <a:r>
-              <a:t>WhatsApp / Helpline: +91 91101 13671  |  Official Website: sagarcoaching.tech  |  Slide 50 of 64</a:t>
+              <a:t>Official Website: sagarcoaching.tech  |  Slide 50 of 64</a:t>
             </a:r>
           </a:p>
         </p:txBody>
@@ -25983,7 +25983,7 @@
               </a:defRPr>
             </a:pPr>
             <a:r>
-              <a:t>WhatsApp / Helpline: +91 91101 13671  |  Official Website: sagarcoaching.tech  |  Slide 51 of 64</a:t>
+              <a:t>Official Website: sagarcoaching.tech  |  Slide 51 of 64</a:t>
             </a:r>
           </a:p>
         </p:txBody>
@@ -26449,7 +26449,7 @@
               </a:defRPr>
             </a:pPr>
             <a:r>
-              <a:t>WhatsApp / Helpline: +91 91101 13671  |  Official Website: sagarcoaching.tech  |  Slide 52 of 64</a:t>
+              <a:t>Official Website: sagarcoaching.tech  |  Slide 52 of 64</a:t>
             </a:r>
           </a:p>
         </p:txBody>
@@ -26983,7 +26983,7 @@
               </a:defRPr>
             </a:pPr>
             <a:r>
-              <a:t>WhatsApp / Helpline: +91 91101 13671  |  Official Website: sagarcoaching.tech  |  Slide 53 of 64</a:t>
+              <a:t>Official Website: sagarcoaching.tech  |  Slide 53 of 64</a:t>
             </a:r>
           </a:p>
         </p:txBody>
@@ -27449,7 +27449,7 @@
               </a:defRPr>
             </a:pPr>
             <a:r>
-              <a:t>WhatsApp / Helpline: +91 91101 13671  |  Official Website: sagarcoaching.tech  |  Slide 54 of 64</a:t>
+              <a:t>Official Website: sagarcoaching.tech  |  Slide 54 of 64</a:t>
             </a:r>
           </a:p>
         </p:txBody>
@@ -27983,7 +27983,7 @@
               </a:defRPr>
             </a:pPr>
             <a:r>
-              <a:t>WhatsApp / Helpline: +91 91101 13671  |  Official Website: sagarcoaching.tech  |  Slide 55 of 64</a:t>
+              <a:t>Official Website: sagarcoaching.tech  |  Slide 55 of 64</a:t>
             </a:r>
           </a:p>
         </p:txBody>
@@ -28449,7 +28449,7 @@
               </a:defRPr>
             </a:pPr>
             <a:r>
-              <a:t>WhatsApp / Helpline: +91 91101 13671  |  Official Website: sagarcoaching.tech  |  Slide 56 of 64</a:t>
+              <a:t>Official Website: sagarcoaching.tech  |  Slide 56 of 64</a:t>
             </a:r>
           </a:p>
         </p:txBody>
@@ -28983,7 +28983,7 @@
               </a:defRPr>
             </a:pPr>
             <a:r>
-              <a:t>WhatsApp / Helpline: +91 91101 13671  |  Official Website: sagarcoaching.tech  |  Slide 57 of 64</a:t>
+              <a:t>Official Website: sagarcoaching.tech  |  Slide 57 of 64</a:t>
             </a:r>
           </a:p>
         </p:txBody>
@@ -29449,7 +29449,7 @@
               </a:defRPr>
             </a:pPr>
             <a:r>
-              <a:t>WhatsApp / Helpline: +91 91101 13671  |  Official Website: sagarcoaching.tech  |  Slide 58 of 64</a:t>
+              <a:t>Official Website: sagarcoaching.tech  |  Slide 58 of 64</a:t>
             </a:r>
           </a:p>
         </p:txBody>
@@ -29983,7 +29983,7 @@
               </a:defRPr>
             </a:pPr>
             <a:r>
-              <a:t>WhatsApp / Helpline: +91 91101 13671  |  Official Website: sagarcoaching.tech  |  Slide 59 of 64</a:t>
+              <a:t>Official Website: sagarcoaching.tech  |  Slide 59 of 64</a:t>
             </a:r>
           </a:p>
         </p:txBody>
@@ -30449,7 +30449,7 @@
               </a:defRPr>
             </a:pPr>
             <a:r>
-              <a:t>WhatsApp / Helpline: +91 91101 13671  |  Official Website: sagarcoaching.tech  |  Slide 6 of 64</a:t>
+              <a:t>Official Website: sagarcoaching.tech  |  Slide 6 of 64</a:t>
             </a:r>
           </a:p>
         </p:txBody>
@@ -30983,7 +30983,7 @@
               </a:defRPr>
             </a:pPr>
             <a:r>
-              <a:t>WhatsApp / Helpline: +91 91101 13671  |  Official Website: sagarcoaching.tech  |  Slide 60 of 64</a:t>
+              <a:t>Official Website: sagarcoaching.tech  |  Slide 60 of 64</a:t>
             </a:r>
           </a:p>
         </p:txBody>
@@ -31517,7 +31517,7 @@
               </a:defRPr>
             </a:pPr>
             <a:r>
-              <a:t>WhatsApp / Helpline: +91 91101 13671  |  Official Website: sagarcoaching.tech  |  Slide 61 of 64</a:t>
+              <a:t>Official Website: sagarcoaching.tech  |  Slide 61 of 64</a:t>
             </a:r>
           </a:p>
         </p:txBody>
@@ -31983,7 +31983,7 @@
               </a:defRPr>
             </a:pPr>
             <a:r>
-              <a:t>WhatsApp / Helpline: +91 91101 13671  |  Official Website: sagarcoaching.tech  |  Slide 62 of 64</a:t>
+              <a:t>Official Website: sagarcoaching.tech  |  Slide 62 of 64</a:t>
             </a:r>
           </a:p>
         </p:txBody>
@@ -32517,7 +32517,7 @@
               </a:defRPr>
             </a:pPr>
             <a:r>
-              <a:t>WhatsApp / Helpline: +91 91101 13671  |  Official Website: sagarcoaching.tech  |  Slide 63 of 64</a:t>
+              <a:t>Official Website: sagarcoaching.tech  |  Slide 63 of 64</a:t>
             </a:r>
           </a:p>
         </p:txBody>
@@ -32898,7 +32898,7 @@
               </a:defRPr>
             </a:pPr>
             <a:r>
-              <a:t>4 ऑल इंडिया 50-PYQ मेगा अभ्यास सेट्स उपलब्ध  ★  20 फुल लेंथ 35-प्रश्नों के ऑल इंडिया मॉक टेस्ट्स उपलब्ध  ★  SST के 35 में से 35 अंक का लक्ष्य पूरा  ★  सफलता का एक ही नाम: सागर कोचिंग सेंटर, भगवानपुर (+91 91101 13671)</a:t>
+              <a:t>4 ऑल इंडिया 50-PYQ मेगा अभ्यास सेट्स उपलब्ध  ★  20 फुल लेंथ 35-प्रश्नों के ऑल इंडिया मॉक टेस्ट्स उपलब्ध  ★  SST के 35 में से 35 अंक का लक्ष्य पूरा  ★  सफलता का एक ही नाम: सागर कोचिंग सेंटर, भगवानपुर ()</a:t>
             </a:r>
           </a:p>
         </p:txBody>
@@ -32934,7 +32934,7 @@
               </a:defRPr>
             </a:pPr>
             <a:r>
-              <a:t>मार्गदर्शक: श्रवण कुमार 'सागर' (Sagar Sir)  |  Helpline: +91 91101 13671  |  sagarcoaching.tech</a:t>
+              <a:t>मार्गदर्शक: श्रवण कुमार 'सागर' (Sagar Sir)  |  sagarcoaching.tech</a:t>
             </a:r>
           </a:p>
         </p:txBody>
@@ -33125,7 +33125,7 @@
               </a:defRPr>
             </a:pPr>
             <a:r>
-              <a:t>WhatsApp / Helpline: +91 91101 13671  |  Official Website: sagarcoaching.tech  |  Slide 7 of 64</a:t>
+              <a:t>Official Website: sagarcoaching.tech  |  Slide 7 of 64</a:t>
             </a:r>
           </a:p>
         </p:txBody>
@@ -33591,7 +33591,7 @@
               </a:defRPr>
             </a:pPr>
             <a:r>
-              <a:t>WhatsApp / Helpline: +91 91101 13671  |  Official Website: sagarcoaching.tech  |  Slide 8 of 64</a:t>
+              <a:t>Official Website: sagarcoaching.tech  |  Slide 8 of 64</a:t>
             </a:r>
           </a:p>
         </p:txBody>
@@ -34125,7 +34125,7 @@
               </a:defRPr>
             </a:pPr>
             <a:r>
-              <a:t>WhatsApp / Helpline: +91 91101 13671  |  Official Website: sagarcoaching.tech  |  Slide 9 of 64</a:t>
+              <a:t>Official Website: sagarcoaching.tech  |  Slide 9 of 64</a:t>
             </a:r>
           </a:p>
         </p:txBody>
